--- a/images/2/No.2-3.pptx
+++ b/images/2/No.2-3.pptx
@@ -1388,7 +1388,7 @@
         </p:nvSpPr>
         <p:spPr>
           <a:xfrm rot="21480000">
-            <a:off x="1548130" y="12605385"/>
+            <a:off x="2386330" y="10314305"/>
             <a:ext cx="10998200" cy="3410585"/>
           </a:xfrm>
           <a:prstGeom prst="rect">
@@ -1407,7 +1407,7 @@
               </a:lnSpc>
             </a:pPr>
             <a:r>
-              <a:rPr sz="40000" i="0" u="none" strike="noStrike" kern="0" cap="none" spc="600" normalizeH="0" dirty="0">
+              <a:rPr sz="19200" i="0" u="none" strike="noStrike" kern="0" cap="none" spc="600" normalizeH="0" dirty="0">
                 <a:solidFill>
                   <a:srgbClr val="AC7AB7"/>
                 </a:solidFill>
